--- a/public/projects/portfolio-v2/Portfolio-Diary-Case-Study.pptx
+++ b/public/projects/portfolio-v2/Portfolio-Diary-Case-Study.pptx
@@ -2,18 +2,18 @@
 <file path=ppt/presentation.xml><?xml version="1.0" encoding="utf-8"?>
 <p:presentation xmlns:p="http://schemas.openxmlformats.org/presentationml/2006/main">
   <p:sldMasterIdLst>
-    <p:sldMasterId xmlns:r="http://schemas.openxmlformats.org/officeDocument/2006/relationships" id="2147483648" r:id="Ra3bd64b6560040b2"/>
+    <p:sldMasterId xmlns:r="http://schemas.openxmlformats.org/officeDocument/2006/relationships" id="2147483648" r:id="R0b43d741c157404e"/>
   </p:sldMasterIdLst>
   <p:notesMasterIdLst>
-    <p:notesMasterId xmlns:r="http://schemas.openxmlformats.org/officeDocument/2006/relationships" r:id="Rbd129f661557423c"/>
+    <p:notesMasterId xmlns:r="http://schemas.openxmlformats.org/officeDocument/2006/relationships" r:id="Rcf3838b21d9e4c89"/>
   </p:notesMasterIdLst>
   <p:sldIdLst>
-    <p:sldId xmlns:r="http://schemas.openxmlformats.org/officeDocument/2006/relationships" id="256" r:id="Rb695a30839be430b"/>
-    <p:sldId xmlns:r="http://schemas.openxmlformats.org/officeDocument/2006/relationships" id="257" r:id="Rd9f4e53e599e47cb"/>
-    <p:sldId xmlns:r="http://schemas.openxmlformats.org/officeDocument/2006/relationships" id="258" r:id="Rb3416f4127cc42ba"/>
-    <p:sldId xmlns:r="http://schemas.openxmlformats.org/officeDocument/2006/relationships" id="259" r:id="R41fde9bba9104926"/>
-    <p:sldId xmlns:r="http://schemas.openxmlformats.org/officeDocument/2006/relationships" id="260" r:id="Rfa163fe49b584f30"/>
-    <p:sldId xmlns:r="http://schemas.openxmlformats.org/officeDocument/2006/relationships" id="261" r:id="R790c2efaccfd4e6e"/>
+    <p:sldId xmlns:r="http://schemas.openxmlformats.org/officeDocument/2006/relationships" id="256" r:id="R0f6d7896d9784a6a"/>
+    <p:sldId xmlns:r="http://schemas.openxmlformats.org/officeDocument/2006/relationships" id="257" r:id="R30a86b76d24247dc"/>
+    <p:sldId xmlns:r="http://schemas.openxmlformats.org/officeDocument/2006/relationships" id="258" r:id="R6209ecaf5c04420f"/>
+    <p:sldId xmlns:r="http://schemas.openxmlformats.org/officeDocument/2006/relationships" id="259" r:id="R8a3d1e5a00e040ae"/>
+    <p:sldId xmlns:r="http://schemas.openxmlformats.org/officeDocument/2006/relationships" id="260" r:id="R696c8ac999884f16"/>
+    <p:sldId xmlns:r="http://schemas.openxmlformats.org/officeDocument/2006/relationships" id="261" r:id="R1c9d0d156c474e70"/>
   </p:sldIdLst>
   <p:sldSz cx="12192000" cy="6858000"/>
   <p:notesSz cx="6858000" cy="9144000"/>
@@ -945,7 +945,7 @@
   </p:cSld>
   <p:clrMap bg1="lt1" tx1="dk1" bg2="lt2" tx2="dk2" accent1="accent1" accent2="accent2" accent3="accent3" accent4="accent4" accent5="accent5" accent6="accent6" hlink="hlink" folHlink="folHlink"/>
   <p:sldLayoutIdLst>
-    <p:sldLayoutId xmlns:r="http://schemas.openxmlformats.org/officeDocument/2006/relationships" id="2147483649" r:id="Rea118fd0b91c4650"/>
+    <p:sldLayoutId xmlns:r="http://schemas.openxmlformats.org/officeDocument/2006/relationships" id="2147483649" r:id="Rb97496281bac4bd1"/>
   </p:sldLayoutIdLst>
   <p:txStyles>
     <p:titleStyle>
@@ -1557,6 +1557,7 @@
           <a:lstStyle xmlns:a="http://schemas.openxmlformats.org/drawingml/2006/main"/>
           <a:p xmlns:a="http://schemas.openxmlformats.org/drawingml/2006/main">
             <a:pPr algn="l">
+              <a:buNone/>
               <a:defRPr sz="975" b="1">
                 <a:solidFill>
                   <a:srgbClr val="376B4B"/>
@@ -1569,7 +1570,7 @@
                   <a:srgbClr val="376B4B"/>
                 </a:solidFill>
               </a:rPr>
-              <a:t>PORTFOLIO V2 · CASE STUDY</a:t>
+              <a:t>PORTFOLIO · CASE STUDY</a:t>
             </a:r>
           </a:p>
         </p:txBody>
@@ -1607,6 +1608,7 @@
           <a:lstStyle xmlns:a="http://schemas.openxmlformats.org/drawingml/2006/main"/>
           <a:p xmlns:a="http://schemas.openxmlformats.org/drawingml/2006/main">
             <a:pPr algn="l">
+              <a:buNone/>
               <a:defRPr sz="5100" b="1">
                 <a:solidFill>
                   <a:srgbClr val="171817"/>
@@ -1624,6 +1626,7 @@
           </a:p>
           <a:p xmlns:a="http://schemas.openxmlformats.org/drawingml/2006/main">
             <a:pPr algn="l">
+              <a:buNone/>
               <a:defRPr sz="5100" b="1">
                 <a:solidFill>
                   <a:srgbClr val="171817"/>
@@ -1674,6 +1677,7 @@
           <a:lstStyle xmlns:a="http://schemas.openxmlformats.org/drawingml/2006/main"/>
           <a:p xmlns:a="http://schemas.openxmlformats.org/drawingml/2006/main">
             <a:pPr algn="l">
+              <a:buNone/>
               <a:defRPr sz="1875" b="0">
                 <a:solidFill>
                   <a:srgbClr val="666B66"/>
@@ -1755,6 +1759,7 @@
           <a:lstStyle xmlns:a="http://schemas.openxmlformats.org/drawingml/2006/main"/>
           <a:p xmlns:a="http://schemas.openxmlformats.org/drawingml/2006/main">
             <a:pPr algn="l">
+              <a:buNone/>
               <a:defRPr sz="1275" b="0">
                 <a:solidFill>
                   <a:srgbClr val="171817"/>
@@ -1805,6 +1810,7 @@
           <a:lstStyle xmlns:a="http://schemas.openxmlformats.org/drawingml/2006/main"/>
           <a:p xmlns:a="http://schemas.openxmlformats.org/drawingml/2006/main">
             <a:pPr algn="l">
+              <a:buNone/>
               <a:defRPr sz="975" b="1">
                 <a:solidFill>
                   <a:srgbClr val="376B4B"/>
@@ -1824,14 +1830,14 @@
       </p:sp>
       <p:pic>
         <p:nvPicPr>
-          <p:cNvPr id="16" name=""/>
+          <p:cNvPr id="18" name=""/>
           <p:cNvPicPr>
             <a:picLocks xmlns:a="http://schemas.openxmlformats.org/drawingml/2006/main" noChangeAspect="1"/>
           </p:cNvPicPr>
           <p:nvPr/>
         </p:nvPicPr>
         <p:blipFill>
-          <a:blip xmlns:r="http://schemas.openxmlformats.org/officeDocument/2006/relationships" xmlns:a="http://schemas.openxmlformats.org/drawingml/2006/main" r:embed="R7bc2ea9ba40f41d7"/>
+          <a:blip xmlns:r="http://schemas.openxmlformats.org/officeDocument/2006/relationships" xmlns:a="http://schemas.openxmlformats.org/drawingml/2006/main" r:embed="Re4dff771aa914f07"/>
           <a:srcRect xmlns:a="http://schemas.openxmlformats.org/drawingml/2006/main" l="27807" t="0" r="27807" b="0"/>
           <a:stretch xmlns:a="http://schemas.openxmlformats.org/drawingml/2006/main">
             <a:fillRect l="0" t="0" r="0" b="0"/>
@@ -1911,6 +1917,7 @@
           <a:lstStyle xmlns:a="http://schemas.openxmlformats.org/drawingml/2006/main"/>
           <a:p xmlns:a="http://schemas.openxmlformats.org/drawingml/2006/main">
             <a:pPr algn="l">
+              <a:buNone/>
               <a:defRPr sz="975" b="1">
                 <a:solidFill>
                   <a:srgbClr val="376B4B"/>
@@ -1961,6 +1968,7 @@
           <a:lstStyle xmlns:a="http://schemas.openxmlformats.org/drawingml/2006/main"/>
           <a:p xmlns:a="http://schemas.openxmlformats.org/drawingml/2006/main">
             <a:pPr algn="l">
+              <a:buNone/>
               <a:defRPr sz="3150" b="1">
                 <a:solidFill>
                   <a:srgbClr val="171817"/>
@@ -2011,6 +2019,7 @@
           <a:lstStyle xmlns:a="http://schemas.openxmlformats.org/drawingml/2006/main"/>
           <a:p xmlns:a="http://schemas.openxmlformats.org/drawingml/2006/main">
             <a:pPr algn="l">
+              <a:buNone/>
               <a:defRPr sz="1650" b="1">
                 <a:solidFill>
                   <a:srgbClr val="171817"/>
@@ -2061,6 +2070,7 @@
           <a:lstStyle xmlns:a="http://schemas.openxmlformats.org/drawingml/2006/main"/>
           <a:p xmlns:a="http://schemas.openxmlformats.org/drawingml/2006/main">
             <a:pPr algn="l">
+              <a:buNone/>
               <a:defRPr sz="1275" b="0">
                 <a:solidFill>
                   <a:srgbClr val="666B66"/>
@@ -2111,6 +2121,7 @@
           <a:lstStyle xmlns:a="http://schemas.openxmlformats.org/drawingml/2006/main"/>
           <a:p xmlns:a="http://schemas.openxmlformats.org/drawingml/2006/main">
             <a:pPr algn="l">
+              <a:buNone/>
               <a:defRPr sz="1650" b="1">
                 <a:solidFill>
                   <a:srgbClr val="171817"/>
@@ -2161,6 +2172,7 @@
           <a:lstStyle xmlns:a="http://schemas.openxmlformats.org/drawingml/2006/main"/>
           <a:p xmlns:a="http://schemas.openxmlformats.org/drawingml/2006/main">
             <a:pPr algn="l">
+              <a:buNone/>
               <a:defRPr sz="1275" b="0">
                 <a:solidFill>
                   <a:srgbClr val="666B66"/>
@@ -2211,6 +2223,7 @@
           <a:lstStyle xmlns:a="http://schemas.openxmlformats.org/drawingml/2006/main"/>
           <a:p xmlns:a="http://schemas.openxmlformats.org/drawingml/2006/main">
             <a:pPr algn="l">
+              <a:buNone/>
               <a:defRPr sz="1650" b="1">
                 <a:solidFill>
                   <a:srgbClr val="171817"/>
@@ -2261,6 +2274,7 @@
           <a:lstStyle xmlns:a="http://schemas.openxmlformats.org/drawingml/2006/main"/>
           <a:p xmlns:a="http://schemas.openxmlformats.org/drawingml/2006/main">
             <a:pPr algn="l">
+              <a:buNone/>
               <a:defRPr sz="1275" b="0">
                 <a:solidFill>
                   <a:srgbClr val="666B66"/>
@@ -2280,14 +2294,14 @@
       </p:sp>
       <p:pic>
         <p:nvPicPr>
-          <p:cNvPr id="21" name=""/>
+          <p:cNvPr id="23" name=""/>
           <p:cNvPicPr>
             <a:picLocks xmlns:a="http://schemas.openxmlformats.org/drawingml/2006/main" noChangeAspect="1"/>
           </p:cNvPicPr>
           <p:nvPr/>
         </p:nvPicPr>
         <p:blipFill>
-          <a:blip xmlns:r="http://schemas.openxmlformats.org/officeDocument/2006/relationships" xmlns:a="http://schemas.openxmlformats.org/drawingml/2006/main" r:embed="R46ac63e62fe84309"/>
+          <a:blip xmlns:r="http://schemas.openxmlformats.org/officeDocument/2006/relationships" xmlns:a="http://schemas.openxmlformats.org/drawingml/2006/main" r:embed="Rca31a9e486da4374"/>
           <a:srcRect xmlns:a="http://schemas.openxmlformats.org/drawingml/2006/main" l="0" t="17277" r="0" b="17277"/>
           <a:stretch xmlns:a="http://schemas.openxmlformats.org/drawingml/2006/main">
             <a:fillRect l="0" t="0" r="0" b="0"/>
@@ -2373,6 +2387,7 @@
           <a:lstStyle xmlns:a="http://schemas.openxmlformats.org/drawingml/2006/main"/>
           <a:p xmlns:a="http://schemas.openxmlformats.org/drawingml/2006/main">
             <a:pPr algn="ctr">
+              <a:buNone/>
               <a:defRPr sz="1050" b="1">
                 <a:solidFill>
                   <a:srgbClr val="376B4B"/>
@@ -2423,6 +2438,7 @@
           <a:lstStyle xmlns:a="http://schemas.openxmlformats.org/drawingml/2006/main"/>
           <a:p xmlns:a="http://schemas.openxmlformats.org/drawingml/2006/main">
             <a:pPr algn="r">
+              <a:buNone/>
               <a:defRPr sz="900" b="0">
                 <a:solidFill>
                   <a:srgbClr val="666B66"/>
@@ -2502,6 +2518,7 @@
           <a:lstStyle xmlns:a="http://schemas.openxmlformats.org/drawingml/2006/main"/>
           <a:p xmlns:a="http://schemas.openxmlformats.org/drawingml/2006/main">
             <a:pPr algn="l">
+              <a:buNone/>
               <a:defRPr sz="975" b="1">
                 <a:solidFill>
                   <a:srgbClr val="376B4B"/>
@@ -2552,6 +2569,7 @@
           <a:lstStyle xmlns:a="http://schemas.openxmlformats.org/drawingml/2006/main"/>
           <a:p xmlns:a="http://schemas.openxmlformats.org/drawingml/2006/main">
             <a:pPr algn="l">
+              <a:buNone/>
               <a:defRPr sz="3150" b="1">
                 <a:solidFill>
                   <a:srgbClr val="171817"/>
@@ -2571,14 +2589,14 @@
       </p:sp>
       <p:pic>
         <p:nvPicPr>
-          <p:cNvPr id="22" name=""/>
+          <p:cNvPr id="24" name=""/>
           <p:cNvPicPr>
             <a:picLocks xmlns:a="http://schemas.openxmlformats.org/drawingml/2006/main" noChangeAspect="1"/>
           </p:cNvPicPr>
           <p:nvPr/>
         </p:nvPicPr>
         <p:blipFill>
-          <a:blip xmlns:r="http://schemas.openxmlformats.org/officeDocument/2006/relationships" xmlns:a="http://schemas.openxmlformats.org/drawingml/2006/main" r:embed="R613c27a1d8d94e73"/>
+          <a:blip xmlns:r="http://schemas.openxmlformats.org/officeDocument/2006/relationships" xmlns:a="http://schemas.openxmlformats.org/drawingml/2006/main" r:embed="R7314773a4ee947ce"/>
           <a:srcRect xmlns:a="http://schemas.openxmlformats.org/drawingml/2006/main" l="0" t="25097" r="0" b="25097"/>
           <a:stretch xmlns:a="http://schemas.openxmlformats.org/drawingml/2006/main">
             <a:fillRect l="0" t="0" r="0" b="0"/>
@@ -2629,6 +2647,7 @@
           <a:lstStyle xmlns:a="http://schemas.openxmlformats.org/drawingml/2006/main"/>
           <a:p xmlns:a="http://schemas.openxmlformats.org/drawingml/2006/main">
             <a:pPr algn="l">
+              <a:buNone/>
               <a:defRPr sz="975" b="1">
                 <a:solidFill>
                   <a:srgbClr val="376B4B"/>
@@ -2679,6 +2698,7 @@
           <a:lstStyle xmlns:a="http://schemas.openxmlformats.org/drawingml/2006/main"/>
           <a:p xmlns:a="http://schemas.openxmlformats.org/drawingml/2006/main">
             <a:pPr algn="l">
+              <a:buNone/>
               <a:defRPr sz="1500" b="1">
                 <a:solidFill>
                   <a:srgbClr val="171817"/>
@@ -2729,6 +2749,7 @@
           <a:lstStyle xmlns:a="http://schemas.openxmlformats.org/drawingml/2006/main"/>
           <a:p xmlns:a="http://schemas.openxmlformats.org/drawingml/2006/main">
             <a:pPr algn="l">
+              <a:buNone/>
               <a:defRPr sz="1200" b="0">
                 <a:solidFill>
                   <a:srgbClr val="666B66"/>
@@ -2810,6 +2831,7 @@
           <a:lstStyle xmlns:a="http://schemas.openxmlformats.org/drawingml/2006/main"/>
           <a:p xmlns:a="http://schemas.openxmlformats.org/drawingml/2006/main">
             <a:pPr algn="l">
+              <a:buNone/>
               <a:defRPr sz="975" b="1">
                 <a:solidFill>
                   <a:srgbClr val="376B4B"/>
@@ -2860,6 +2882,7 @@
           <a:lstStyle xmlns:a="http://schemas.openxmlformats.org/drawingml/2006/main"/>
           <a:p xmlns:a="http://schemas.openxmlformats.org/drawingml/2006/main">
             <a:pPr algn="l">
+              <a:buNone/>
               <a:defRPr sz="1500" b="1">
                 <a:solidFill>
                   <a:srgbClr val="171817"/>
@@ -2910,6 +2933,7 @@
           <a:lstStyle xmlns:a="http://schemas.openxmlformats.org/drawingml/2006/main"/>
           <a:p xmlns:a="http://schemas.openxmlformats.org/drawingml/2006/main">
             <a:pPr algn="l">
+              <a:buNone/>
               <a:defRPr sz="1200" b="0">
                 <a:solidFill>
                   <a:srgbClr val="666B66"/>
@@ -2991,6 +3015,7 @@
           <a:lstStyle xmlns:a="http://schemas.openxmlformats.org/drawingml/2006/main"/>
           <a:p xmlns:a="http://schemas.openxmlformats.org/drawingml/2006/main">
             <a:pPr algn="l">
+              <a:buNone/>
               <a:defRPr sz="975" b="1">
                 <a:solidFill>
                   <a:srgbClr val="376B4B"/>
@@ -3041,6 +3066,7 @@
           <a:lstStyle xmlns:a="http://schemas.openxmlformats.org/drawingml/2006/main"/>
           <a:p xmlns:a="http://schemas.openxmlformats.org/drawingml/2006/main">
             <a:pPr algn="l">
+              <a:buNone/>
               <a:defRPr sz="1500" b="1">
                 <a:solidFill>
                   <a:srgbClr val="171817"/>
@@ -3091,6 +3117,7 @@
           <a:lstStyle xmlns:a="http://schemas.openxmlformats.org/drawingml/2006/main"/>
           <a:p xmlns:a="http://schemas.openxmlformats.org/drawingml/2006/main">
             <a:pPr algn="l">
+              <a:buNone/>
               <a:defRPr sz="1200" b="0">
                 <a:solidFill>
                   <a:srgbClr val="666B66"/>
@@ -3172,6 +3199,7 @@
           <a:lstStyle xmlns:a="http://schemas.openxmlformats.org/drawingml/2006/main"/>
           <a:p xmlns:a="http://schemas.openxmlformats.org/drawingml/2006/main">
             <a:pPr algn="l">
+              <a:buNone/>
               <a:defRPr sz="975" b="1">
                 <a:solidFill>
                   <a:srgbClr val="376B4B"/>
@@ -3222,6 +3250,7 @@
           <a:lstStyle xmlns:a="http://schemas.openxmlformats.org/drawingml/2006/main"/>
           <a:p xmlns:a="http://schemas.openxmlformats.org/drawingml/2006/main">
             <a:pPr algn="l">
+              <a:buNone/>
               <a:defRPr sz="1500" b="1">
                 <a:solidFill>
                   <a:srgbClr val="171817"/>
@@ -3272,6 +3301,7 @@
           <a:lstStyle xmlns:a="http://schemas.openxmlformats.org/drawingml/2006/main"/>
           <a:p xmlns:a="http://schemas.openxmlformats.org/drawingml/2006/main">
             <a:pPr algn="l">
+              <a:buNone/>
               <a:defRPr sz="1200" b="0">
                 <a:solidFill>
                   <a:srgbClr val="666B66"/>
@@ -3322,6 +3352,7 @@
           <a:lstStyle xmlns:a="http://schemas.openxmlformats.org/drawingml/2006/main"/>
           <a:p xmlns:a="http://schemas.openxmlformats.org/drawingml/2006/main">
             <a:pPr algn="r">
+              <a:buNone/>
               <a:defRPr sz="900" b="0">
                 <a:solidFill>
                   <a:srgbClr val="666B66"/>
@@ -3401,6 +3432,7 @@
           <a:lstStyle xmlns:a="http://schemas.openxmlformats.org/drawingml/2006/main"/>
           <a:p xmlns:a="http://schemas.openxmlformats.org/drawingml/2006/main">
             <a:pPr algn="l">
+              <a:buNone/>
               <a:defRPr sz="975" b="1">
                 <a:solidFill>
                   <a:srgbClr val="376B4B"/>
@@ -3451,6 +3483,7 @@
           <a:lstStyle xmlns:a="http://schemas.openxmlformats.org/drawingml/2006/main"/>
           <a:p xmlns:a="http://schemas.openxmlformats.org/drawingml/2006/main">
             <a:pPr algn="l">
+              <a:buNone/>
               <a:defRPr sz="3150" b="1">
                 <a:solidFill>
                   <a:srgbClr val="171817"/>
@@ -3501,6 +3534,7 @@
           <a:lstStyle xmlns:a="http://schemas.openxmlformats.org/drawingml/2006/main"/>
           <a:p xmlns:a="http://schemas.openxmlformats.org/drawingml/2006/main">
             <a:pPr algn="l">
+              <a:buNone/>
               <a:defRPr sz="1350" b="0">
                 <a:solidFill>
                   <a:srgbClr val="666B66"/>
@@ -3520,14 +3554,14 @@
       </p:sp>
       <p:pic>
         <p:nvPicPr>
-          <p:cNvPr id="15" name=""/>
+          <p:cNvPr id="17" name=""/>
           <p:cNvPicPr>
             <a:picLocks xmlns:a="http://schemas.openxmlformats.org/drawingml/2006/main" noChangeAspect="1"/>
           </p:cNvPicPr>
           <p:nvPr/>
         </p:nvPicPr>
         <p:blipFill>
-          <a:blip xmlns:r="http://schemas.openxmlformats.org/officeDocument/2006/relationships" xmlns:a="http://schemas.openxmlformats.org/drawingml/2006/main" r:embed="R13f351a446644bca"/>
+          <a:blip xmlns:r="http://schemas.openxmlformats.org/officeDocument/2006/relationships" xmlns:a="http://schemas.openxmlformats.org/drawingml/2006/main" r:embed="Rfa5e97a6c9bd4325"/>
           <a:srcRect xmlns:a="http://schemas.openxmlformats.org/drawingml/2006/main" l="0" t="484" r="0" b="484"/>
           <a:stretch xmlns:a="http://schemas.openxmlformats.org/drawingml/2006/main">
             <a:fillRect l="0" t="0" r="0" b="0"/>
@@ -3578,6 +3612,7 @@
           <a:lstStyle xmlns:a="http://schemas.openxmlformats.org/drawingml/2006/main"/>
           <a:p xmlns:a="http://schemas.openxmlformats.org/drawingml/2006/main">
             <a:pPr algn="l">
+              <a:buNone/>
               <a:defRPr sz="975" b="1">
                 <a:solidFill>
                   <a:srgbClr val="376B4B"/>
@@ -3628,6 +3663,7 @@
           <a:lstStyle xmlns:a="http://schemas.openxmlformats.org/drawingml/2006/main"/>
           <a:p xmlns:a="http://schemas.openxmlformats.org/drawingml/2006/main">
             <a:pPr algn="l">
+              <a:buNone/>
               <a:defRPr sz="1275" b="1">
                 <a:solidFill>
                   <a:srgbClr val="171817"/>
@@ -3678,6 +3714,7 @@
           <a:lstStyle xmlns:a="http://schemas.openxmlformats.org/drawingml/2006/main"/>
           <a:p xmlns:a="http://schemas.openxmlformats.org/drawingml/2006/main">
             <a:pPr algn="l">
+              <a:buNone/>
               <a:defRPr sz="975" b="1">
                 <a:solidFill>
                   <a:srgbClr val="376B4B"/>
@@ -3728,6 +3765,7 @@
           <a:lstStyle xmlns:a="http://schemas.openxmlformats.org/drawingml/2006/main"/>
           <a:p xmlns:a="http://schemas.openxmlformats.org/drawingml/2006/main">
             <a:pPr algn="l">
+              <a:buNone/>
               <a:defRPr sz="1275" b="1">
                 <a:solidFill>
                   <a:srgbClr val="171817"/>
@@ -3778,6 +3816,7 @@
           <a:lstStyle xmlns:a="http://schemas.openxmlformats.org/drawingml/2006/main"/>
           <a:p xmlns:a="http://schemas.openxmlformats.org/drawingml/2006/main">
             <a:pPr algn="l">
+              <a:buNone/>
               <a:defRPr sz="975" b="1">
                 <a:solidFill>
                   <a:srgbClr val="376B4B"/>
@@ -3828,6 +3867,7 @@
           <a:lstStyle xmlns:a="http://schemas.openxmlformats.org/drawingml/2006/main"/>
           <a:p xmlns:a="http://schemas.openxmlformats.org/drawingml/2006/main">
             <a:pPr algn="l">
+              <a:buNone/>
               <a:defRPr sz="1275" b="1">
                 <a:solidFill>
                   <a:srgbClr val="171817"/>
@@ -3878,6 +3918,7 @@
           <a:lstStyle xmlns:a="http://schemas.openxmlformats.org/drawingml/2006/main"/>
           <a:p xmlns:a="http://schemas.openxmlformats.org/drawingml/2006/main">
             <a:pPr algn="r">
+              <a:buNone/>
               <a:defRPr sz="900" b="0">
                 <a:solidFill>
                   <a:srgbClr val="666B66"/>
@@ -3957,6 +3998,7 @@
           <a:lstStyle xmlns:a="http://schemas.openxmlformats.org/drawingml/2006/main"/>
           <a:p xmlns:a="http://schemas.openxmlformats.org/drawingml/2006/main">
             <a:pPr algn="l">
+              <a:buNone/>
               <a:defRPr sz="975" b="1">
                 <a:solidFill>
                   <a:srgbClr val="376B4B"/>
@@ -4007,6 +4049,7 @@
           <a:lstStyle xmlns:a="http://schemas.openxmlformats.org/drawingml/2006/main"/>
           <a:p xmlns:a="http://schemas.openxmlformats.org/drawingml/2006/main">
             <a:pPr algn="l">
+              <a:buNone/>
               <a:defRPr sz="3150" b="1">
                 <a:solidFill>
                   <a:srgbClr val="FFFFFF"/>
@@ -4057,6 +4100,7 @@
           <a:lstStyle xmlns:a="http://schemas.openxmlformats.org/drawingml/2006/main"/>
           <a:p xmlns:a="http://schemas.openxmlformats.org/drawingml/2006/main">
             <a:pPr algn="l">
+              <a:buNone/>
               <a:defRPr sz="1350" b="0">
                 <a:solidFill>
                   <a:srgbClr val="B7BDB8"/>
@@ -4107,6 +4151,7 @@
           <a:lstStyle xmlns:a="http://schemas.openxmlformats.org/drawingml/2006/main"/>
           <a:p xmlns:a="http://schemas.openxmlformats.org/drawingml/2006/main">
             <a:pPr algn="l">
+              <a:buNone/>
               <a:defRPr sz="2850" b="1">
                 <a:solidFill>
                   <a:srgbClr val="376B4B"/>
@@ -4157,6 +4202,7 @@
           <a:lstStyle xmlns:a="http://schemas.openxmlformats.org/drawingml/2006/main"/>
           <a:p xmlns:a="http://schemas.openxmlformats.org/drawingml/2006/main">
             <a:pPr algn="l">
+              <a:buNone/>
               <a:defRPr sz="2850" b="1">
                 <a:solidFill>
                   <a:srgbClr val="376B4B"/>
@@ -4207,6 +4253,7 @@
           <a:lstStyle xmlns:a="http://schemas.openxmlformats.org/drawingml/2006/main"/>
           <a:p xmlns:a="http://schemas.openxmlformats.org/drawingml/2006/main">
             <a:pPr algn="l">
+              <a:buNone/>
               <a:defRPr sz="2850" b="1">
                 <a:solidFill>
                   <a:srgbClr val="376B4B"/>
@@ -4397,6 +4444,7 @@
           <a:lstStyle xmlns:a="http://schemas.openxmlformats.org/drawingml/2006/main"/>
           <a:p xmlns:a="http://schemas.openxmlformats.org/drawingml/2006/main">
             <a:pPr algn="l">
+              <a:buNone/>
               <a:defRPr sz="975" b="1">
                 <a:solidFill>
                   <a:srgbClr val="376B4B"/>
@@ -4447,6 +4495,7 @@
           <a:lstStyle xmlns:a="http://schemas.openxmlformats.org/drawingml/2006/main"/>
           <a:p xmlns:a="http://schemas.openxmlformats.org/drawingml/2006/main">
             <a:pPr algn="l">
+              <a:buNone/>
               <a:defRPr sz="2100" b="1">
                 <a:solidFill>
                   <a:srgbClr val="FFFFFF"/>
@@ -4497,6 +4546,7 @@
           <a:lstStyle xmlns:a="http://schemas.openxmlformats.org/drawingml/2006/main"/>
           <a:p xmlns:a="http://schemas.openxmlformats.org/drawingml/2006/main">
             <a:pPr algn="l">
+              <a:buNone/>
               <a:defRPr sz="1200" b="0">
                 <a:solidFill>
                   <a:srgbClr val="B7BDB8"/>
@@ -4547,6 +4597,7 @@
           <a:lstStyle xmlns:a="http://schemas.openxmlformats.org/drawingml/2006/main"/>
           <a:p xmlns:a="http://schemas.openxmlformats.org/drawingml/2006/main">
             <a:pPr algn="l">
+              <a:buNone/>
               <a:defRPr sz="975" b="1">
                 <a:solidFill>
                   <a:srgbClr val="376B4B"/>
@@ -4597,6 +4648,7 @@
           <a:lstStyle xmlns:a="http://schemas.openxmlformats.org/drawingml/2006/main"/>
           <a:p xmlns:a="http://schemas.openxmlformats.org/drawingml/2006/main">
             <a:pPr algn="l">
+              <a:buNone/>
               <a:defRPr sz="2025" b="1">
                 <a:solidFill>
                   <a:srgbClr val="FFFFFF"/>
@@ -4647,6 +4699,7 @@
           <a:lstStyle xmlns:a="http://schemas.openxmlformats.org/drawingml/2006/main"/>
           <a:p xmlns:a="http://schemas.openxmlformats.org/drawingml/2006/main">
             <a:pPr algn="l">
+              <a:buNone/>
               <a:defRPr sz="1200" b="0">
                 <a:solidFill>
                   <a:srgbClr val="B7BDB8"/>
@@ -4697,6 +4750,7 @@
           <a:lstStyle xmlns:a="http://schemas.openxmlformats.org/drawingml/2006/main"/>
           <a:p xmlns:a="http://schemas.openxmlformats.org/drawingml/2006/main">
             <a:pPr algn="l">
+              <a:buNone/>
               <a:defRPr sz="2550" b="1">
                 <a:solidFill>
                   <a:srgbClr val="FFFFFF"/>
@@ -4747,6 +4801,7 @@
           <a:lstStyle xmlns:a="http://schemas.openxmlformats.org/drawingml/2006/main"/>
           <a:p xmlns:a="http://schemas.openxmlformats.org/drawingml/2006/main">
             <a:pPr algn="l">
+              <a:buNone/>
               <a:defRPr sz="1275" b="0">
                 <a:solidFill>
                   <a:srgbClr val="D8DDD9"/>
@@ -4797,6 +4852,7 @@
           <a:lstStyle xmlns:a="http://schemas.openxmlformats.org/drawingml/2006/main"/>
           <a:p xmlns:a="http://schemas.openxmlformats.org/drawingml/2006/main">
             <a:pPr algn="l">
+              <a:buNone/>
               <a:defRPr sz="2550" b="1">
                 <a:solidFill>
                   <a:srgbClr val="FFFFFF"/>
@@ -4847,6 +4903,7 @@
           <a:lstStyle xmlns:a="http://schemas.openxmlformats.org/drawingml/2006/main"/>
           <a:p xmlns:a="http://schemas.openxmlformats.org/drawingml/2006/main">
             <a:pPr algn="l">
+              <a:buNone/>
               <a:defRPr sz="1275" b="0">
                 <a:solidFill>
                   <a:srgbClr val="D8DDD9"/>
@@ -4928,6 +4985,7 @@
           <a:lstStyle xmlns:a="http://schemas.openxmlformats.org/drawingml/2006/main"/>
           <a:p xmlns:a="http://schemas.openxmlformats.org/drawingml/2006/main">
             <a:pPr algn="l">
+              <a:buNone/>
               <a:defRPr sz="1200" b="1">
                 <a:solidFill>
                   <a:srgbClr val="376B4B"/>
@@ -4978,6 +5036,7 @@
           <a:lstStyle xmlns:a="http://schemas.openxmlformats.org/drawingml/2006/main"/>
           <a:p xmlns:a="http://schemas.openxmlformats.org/drawingml/2006/main">
             <a:pPr algn="l">
+              <a:buNone/>
               <a:defRPr sz="1200" b="0">
                 <a:solidFill>
                   <a:srgbClr val="D8DDD9"/>
@@ -5028,6 +5087,7 @@
           <a:lstStyle xmlns:a="http://schemas.openxmlformats.org/drawingml/2006/main"/>
           <a:p xmlns:a="http://schemas.openxmlformats.org/drawingml/2006/main">
             <a:pPr algn="r">
+              <a:buNone/>
               <a:defRPr sz="900" b="0">
                 <a:solidFill>
                   <a:srgbClr val="666B66"/>
@@ -5107,6 +5167,7 @@
           <a:lstStyle xmlns:a="http://schemas.openxmlformats.org/drawingml/2006/main"/>
           <a:p xmlns:a="http://schemas.openxmlformats.org/drawingml/2006/main">
             <a:pPr algn="l">
+              <a:buNone/>
               <a:defRPr sz="975" b="1">
                 <a:solidFill>
                   <a:srgbClr val="376B4B"/>
@@ -5157,6 +5218,7 @@
           <a:lstStyle xmlns:a="http://schemas.openxmlformats.org/drawingml/2006/main"/>
           <a:p xmlns:a="http://schemas.openxmlformats.org/drawingml/2006/main">
             <a:pPr algn="l">
+              <a:buNone/>
               <a:defRPr sz="3750" b="1">
                 <a:solidFill>
                   <a:srgbClr val="171817"/>
@@ -5207,6 +5269,7 @@
           <a:lstStyle xmlns:a="http://schemas.openxmlformats.org/drawingml/2006/main"/>
           <a:p xmlns:a="http://schemas.openxmlformats.org/drawingml/2006/main">
             <a:pPr algn="l">
+              <a:buNone/>
               <a:defRPr sz="1650" b="0">
                 <a:solidFill>
                   <a:srgbClr val="666B66"/>
@@ -5219,7 +5282,7 @@
                   <a:srgbClr val="666B66"/>
                 </a:solidFill>
               </a:rPr>
-              <a:t>Portfolio Diary is live as a focused extension of Portfolio V2—not a social network, but a durable place for personal moments.</a:t>
+              <a:t>Portfolio Diary is live as a focused extension of the portfolio—not a social network, but a durable place for personal moments.</a:t>
             </a:r>
           </a:p>
         </p:txBody>
@@ -5288,6 +5351,7 @@
           <a:lstStyle xmlns:a="http://schemas.openxmlformats.org/drawingml/2006/main"/>
           <a:p xmlns:a="http://schemas.openxmlformats.org/drawingml/2006/main">
             <a:pPr algn="l">
+              <a:buNone/>
               <a:defRPr sz="1050" b="1">
                 <a:solidFill>
                   <a:srgbClr val="376B4B"/>
@@ -5338,6 +5402,7 @@
           <a:lstStyle xmlns:a="http://schemas.openxmlformats.org/drawingml/2006/main"/>
           <a:p xmlns:a="http://schemas.openxmlformats.org/drawingml/2006/main">
             <a:pPr algn="l">
+              <a:buNone/>
               <a:defRPr sz="1800" b="1">
                 <a:solidFill>
                   <a:srgbClr val="171817"/>
@@ -5388,6 +5453,7 @@
           <a:lstStyle xmlns:a="http://schemas.openxmlformats.org/drawingml/2006/main"/>
           <a:p xmlns:a="http://schemas.openxmlformats.org/drawingml/2006/main">
             <a:pPr algn="l">
+              <a:buNone/>
               <a:defRPr sz="1275" b="0">
                 <a:solidFill>
                   <a:srgbClr val="666B66"/>
@@ -5438,6 +5504,7 @@
           <a:lstStyle xmlns:a="http://schemas.openxmlformats.org/drawingml/2006/main"/>
           <a:p xmlns:a="http://schemas.openxmlformats.org/drawingml/2006/main">
             <a:pPr algn="l">
+              <a:buNone/>
               <a:defRPr sz="1050" b="1">
                 <a:solidFill>
                   <a:srgbClr val="376B4B"/>
@@ -5488,6 +5555,7 @@
           <a:lstStyle xmlns:a="http://schemas.openxmlformats.org/drawingml/2006/main"/>
           <a:p xmlns:a="http://schemas.openxmlformats.org/drawingml/2006/main">
             <a:pPr algn="l">
+              <a:buNone/>
               <a:defRPr sz="1800" b="1">
                 <a:solidFill>
                   <a:srgbClr val="171817"/>
@@ -5538,6 +5606,7 @@
           <a:lstStyle xmlns:a="http://schemas.openxmlformats.org/drawingml/2006/main"/>
           <a:p xmlns:a="http://schemas.openxmlformats.org/drawingml/2006/main">
             <a:pPr algn="l">
+              <a:buNone/>
               <a:defRPr sz="1275" b="0">
                 <a:solidFill>
                   <a:srgbClr val="666B66"/>
@@ -5588,6 +5657,7 @@
           <a:lstStyle xmlns:a="http://schemas.openxmlformats.org/drawingml/2006/main"/>
           <a:p xmlns:a="http://schemas.openxmlformats.org/drawingml/2006/main">
             <a:pPr algn="l">
+              <a:buNone/>
               <a:defRPr sz="1050" b="1">
                 <a:solidFill>
                   <a:srgbClr val="376B4B"/>
@@ -5638,6 +5708,7 @@
           <a:lstStyle xmlns:a="http://schemas.openxmlformats.org/drawingml/2006/main"/>
           <a:p xmlns:a="http://schemas.openxmlformats.org/drawingml/2006/main">
             <a:pPr algn="l">
+              <a:buNone/>
               <a:defRPr sz="1800" b="1">
                 <a:solidFill>
                   <a:srgbClr val="171817"/>
@@ -5688,6 +5759,7 @@
           <a:lstStyle xmlns:a="http://schemas.openxmlformats.org/drawingml/2006/main"/>
           <a:p xmlns:a="http://schemas.openxmlformats.org/drawingml/2006/main">
             <a:pPr algn="l">
+              <a:buNone/>
               <a:defRPr sz="1275" b="0">
                 <a:solidFill>
                   <a:srgbClr val="666B66"/>
@@ -5773,6 +5845,7 @@
           <a:lstStyle xmlns:a="http://schemas.openxmlformats.org/drawingml/2006/main"/>
           <a:p xmlns:a="http://schemas.openxmlformats.org/drawingml/2006/main">
             <a:pPr algn="ctr">
+              <a:buNone/>
               <a:defRPr sz="1275" b="1">
                 <a:solidFill>
                   <a:srgbClr val="FFFFFF"/>
@@ -5823,6 +5896,7 @@
           <a:lstStyle xmlns:a="http://schemas.openxmlformats.org/drawingml/2006/main"/>
           <a:p xmlns:a="http://schemas.openxmlformats.org/drawingml/2006/main">
             <a:pPr algn="r">
+              <a:buNone/>
               <a:defRPr sz="975" b="1">
                 <a:solidFill>
                   <a:srgbClr val="171817"/>
@@ -5835,7 +5909,7 @@
                   <a:srgbClr val="171817"/>
                 </a:solidFill>
               </a:rPr>
-              <a:t>CHIT THWAY · PORTFOLIO V2</a:t>
+              <a:t>CHIT THWAY · PORTFOLIO</a:t>
             </a:r>
           </a:p>
         </p:txBody>
@@ -5873,6 +5947,7 @@
           <a:lstStyle xmlns:a="http://schemas.openxmlformats.org/drawingml/2006/main"/>
           <a:p xmlns:a="http://schemas.openxmlformats.org/drawingml/2006/main">
             <a:pPr algn="r">
+              <a:buNone/>
               <a:defRPr sz="900" b="0">
                 <a:solidFill>
                   <a:srgbClr val="666B66"/>
